--- a/media/exports/reports/2026-07/overtime.pptx
+++ b/media/exports/reports/2026-07/overtime.pptx
@@ -238,70 +238,70 @@
                 <c:formatCode>0.0"%";[Red](0.0"%")</c:formatCode>
                 <c:ptCount val="22"/>
                 <c:pt idx="0">
-                  <c:v>1.5</c:v>
+                  <c:v>1.6</c:v>
                 </c:pt>
                 <c:pt idx="1">
-                  <c:v>1.3</c:v>
+                  <c:v>2.7</c:v>
                 </c:pt>
                 <c:pt idx="2">
-                  <c:v>1.9</c:v>
+                  <c:v>2.2</c:v>
                 </c:pt>
                 <c:pt idx="3">
-                  <c:v>2.3</c:v>
+                  <c:v>3.0</c:v>
                 </c:pt>
                 <c:pt idx="4">
-                  <c:v>2.8</c:v>
+                  <c:v>4.6</c:v>
                 </c:pt>
                 <c:pt idx="5">
-                  <c:v>2.4</c:v>
+                  <c:v>4.4</c:v>
                 </c:pt>
                 <c:pt idx="6">
                   <c:v>3.6</c:v>
                 </c:pt>
                 <c:pt idx="7">
-                  <c:v>2.6</c:v>
+                  <c:v>3.7</c:v>
                 </c:pt>
                 <c:pt idx="8">
                   <c:v>2.8</c:v>
                 </c:pt>
                 <c:pt idx="9">
-                  <c:v>2.4</c:v>
+                  <c:v>3.3</c:v>
                 </c:pt>
                 <c:pt idx="10">
-                  <c:v>4.6</c:v>
+                  <c:v>3.3</c:v>
                 </c:pt>
                 <c:pt idx="11">
-                  <c:v>3.0</c:v>
+                  <c:v>3.7</c:v>
                 </c:pt>
                 <c:pt idx="12">
-                  <c:v>4.0</c:v>
+                  <c:v>3.9</c:v>
                 </c:pt>
                 <c:pt idx="13">
-                  <c:v>3.9</c:v>
+                  <c:v>3.8</c:v>
                 </c:pt>
                 <c:pt idx="14">
-                  <c:v>3.5</c:v>
+                  <c:v>7.7</c:v>
                 </c:pt>
                 <c:pt idx="15">
-                  <c:v>3.8</c:v>
+                  <c:v>3.1</c:v>
                 </c:pt>
                 <c:pt idx="16">
-                  <c:v>5.8</c:v>
+                  <c:v>4.2</c:v>
                 </c:pt>
                 <c:pt idx="17">
-                  <c:v>5.6</c:v>
+                  <c:v>4.2</c:v>
                 </c:pt>
                 <c:pt idx="18">
-                  <c:v>5.8</c:v>
+                  <c:v>5.9</c:v>
                 </c:pt>
                 <c:pt idx="19">
-                  <c:v>6.5</c:v>
+                  <c:v>6.7</c:v>
                 </c:pt>
                 <c:pt idx="20">
-                  <c:v>5.4</c:v>
+                  <c:v>7.2</c:v>
                 </c:pt>
                 <c:pt idx="21">
-                  <c:v>6.2</c:v>
+                  <c:v>4.9</c:v>
                 </c:pt>
               </c:numCache>
             </c:numRef>
@@ -350,7 +350,7 @@
         <c:axId val="-2100718248"/>
         <c:scaling>
           <c:orientation val="minMax"/>
-          <c:max val="8.0"/>
+          <c:max val="10.0"/>
           <c:min val="0.0"/>
         </c:scaling>
         <c:delete val="0"/>
@@ -485,10 +485,10 @@
                   <c:v>Paperwork and quotes</c:v>
                 </c:pt>
                 <c:pt idx="1">
-                  <c:v>Short-staffed</c:v>
+                  <c:v>Installation ran over</c:v>
                 </c:pt>
                 <c:pt idx="2">
-                  <c:v>Installation ran over</c:v>
+                  <c:v>Short-staffed</c:v>
                 </c:pt>
                 <c:pt idx="3">
                   <c:v>After-hours call-out</c:v>
@@ -503,16 +503,16 @@
                 <c:formatCode>#,##0;[Red](#,##0)</c:formatCode>
                 <c:ptCount val="4"/>
                 <c:pt idx="0">
-                  <c:v>5.5</c:v>
+                  <c:v>9.0</c:v>
                 </c:pt>
                 <c:pt idx="1">
-                  <c:v>8.5</c:v>
+                  <c:v>10.5</c:v>
                 </c:pt>
                 <c:pt idx="2">
-                  <c:v>18.0</c:v>
+                  <c:v>11.0</c:v>
                 </c:pt>
                 <c:pt idx="3">
-                  <c:v>37.5</c:v>
+                  <c:v>27.0</c:v>
                 </c:pt>
               </c:numCache>
             </c:numRef>
@@ -576,7 +576,7 @@
       <c:valAx>
         <c:axId val="-2113994440"/>
         <c:scaling>
-          <c:max val="43.125"/>
+          <c:max val="31.049999999999997"/>
           <c:min val="0.0"/>
         </c:scaling>
         <c:delete/>
@@ -704,25 +704,25 @@
               <c:strCache>
                 <c:ptCount val="7"/>
                 <c:pt idx="0">
+                  <c:v>Technician T4</c:v>
+                </c:pt>
+                <c:pt idx="1">
                   <c:v>Technician T6</c:v>
                 </c:pt>
-                <c:pt idx="1">
+                <c:pt idx="2">
+                  <c:v>Technician T7</c:v>
+                </c:pt>
+                <c:pt idx="3">
+                  <c:v>Technician T3</c:v>
+                </c:pt>
+                <c:pt idx="4">
                   <c:v>Technician T2</c:v>
                 </c:pt>
-                <c:pt idx="2">
-                  <c:v>Technician T3</c:v>
-                </c:pt>
-                <c:pt idx="3">
-                  <c:v>Technician T1</c:v>
-                </c:pt>
-                <c:pt idx="4">
-                  <c:v>Technician T7</c:v>
-                </c:pt>
                 <c:pt idx="5">
-                  <c:v>Technician T4</c:v>
+                  <c:v>Technician T5</c:v>
                 </c:pt>
                 <c:pt idx="6">
-                  <c:v>Technician T5</c:v>
+                  <c:v>Technician T1</c:v>
                 </c:pt>
               </c:strCache>
             </c:strRef>
@@ -734,25 +734,25 @@
                 <c:formatCode>#,##0;[Red](#,##0)</c:formatCode>
                 <c:ptCount val="7"/>
                 <c:pt idx="0">
-                  <c:v>2.5</c:v>
+                  <c:v>2.0</c:v>
                 </c:pt>
                 <c:pt idx="1">
-                  <c:v>3.5</c:v>
+                  <c:v>4.0</c:v>
                 </c:pt>
                 <c:pt idx="2">
-                  <c:v>7.5</c:v>
+                  <c:v>5.0</c:v>
                 </c:pt>
                 <c:pt idx="3">
-                  <c:v>11.0</c:v>
+                  <c:v>8.5</c:v>
                 </c:pt>
                 <c:pt idx="4">
-                  <c:v>14.0</c:v>
+                  <c:v>8.5</c:v>
                 </c:pt>
                 <c:pt idx="5">
-                  <c:v>15.0</c:v>
+                  <c:v>9.0</c:v>
                 </c:pt>
                 <c:pt idx="6">
-                  <c:v>16.0</c:v>
+                  <c:v>20.5</c:v>
                 </c:pt>
               </c:numCache>
             </c:numRef>
@@ -816,7 +816,7 @@
       <c:valAx>
         <c:axId val="-2113994440"/>
         <c:scaling>
-          <c:max val="18.4"/>
+          <c:max val="23.575"/>
           <c:min val="0.0"/>
         </c:scaling>
         <c:delete/>
@@ -1313,7 +1313,7 @@
           <a:lstStyle/>
           <a:p>
             <a:r>
-              <a:t>Where is overtime creeping up, and why?. Overtime, July: 6.2%; Overtime hours, July: 69.5 h; July last year: 2.4%. Technicians worked 69.5 h of overtime in July, 6.2% of ordinary hours (target under 5.0%), against 5.4% in June. Over the last year it has gone from 2.4% to 6.2%. After-hours call-out is the main reason: 37.5 h, 54.0% of the overtime. Technician T5 carried the most (16.0 h). Above target by 13.3 h.</a:t>
+              <a:t>Where is overtime creeping up, and why?. Overtime, July: 4.9%; Overtime hours, July: 57.5 h; July last year: 3.3%. Technicians worked 57.5 h of overtime in July, 4.9% of ordinary hours (target under 5.0%), against 7.2% in June. Over the last year it has gone from 3.3% to 4.9%. After-hours call-out is the main reason: 27.0 h, 47.0% of the overtime. Technician T1 carried the most (20.5 h).</a:t>
             </a:r>
           </a:p>
         </p:txBody>
@@ -4868,7 +4868,7 @@
                 </a:solidFill>
                 <a:latin typeface="Roboto"/>
               </a:rPr>
-              <a:t>Data retrieved 2pm, Tue 6 Oct 2026 · Generated 8 Oct 2026, 6:29pm · Sample data · Made with Python (python-pptx)</a:t>
+              <a:t>Data retrieved 2pm, Tue 6 Oct 2026 · Generated 8 Oct 2026, 11:41pm · Sample data · Made with Python (python-pptx)</a:t>
             </a:r>
           </a:p>
         </p:txBody>
@@ -5210,11 +5210,11 @@
             <a:r>
               <a:rPr sz="2200" b="1">
                 <a:solidFill>
-                  <a:srgbClr val="B42318"/>
+                  <a:srgbClr val="2F7A5D"/>
                 </a:solidFill>
                 <a:latin typeface="Roboto"/>
               </a:rPr>
-              <a:t>6.2%</a:t>
+              <a:t>4.9%</a:t>
             </a:r>
           </a:p>
         </p:txBody>
@@ -5380,7 +5380,7 @@
                 </a:solidFill>
                 <a:latin typeface="Roboto"/>
               </a:rPr>
-              <a:t>69.5 h</a:t>
+              <a:t>57.5 h</a:t>
             </a:r>
           </a:p>
         </p:txBody>
@@ -5419,7 +5419,7 @@
                 </a:solidFill>
                 <a:latin typeface="Roboto"/>
               </a:rPr>
-              <a:t>June 62.5 h</a:t>
+              <a:t>June 81.0 h</a:t>
             </a:r>
           </a:p>
         </p:txBody>
@@ -5546,7 +5546,7 @@
                 </a:solidFill>
                 <a:latin typeface="Roboto"/>
               </a:rPr>
-              <a:t>2.4%</a:t>
+              <a:t>3.3%</a:t>
             </a:r>
           </a:p>
         </p:txBody>
@@ -5585,7 +5585,7 @@
                 </a:solidFill>
                 <a:latin typeface="Roboto"/>
               </a:rPr>
-              <a:t>27.5 h of overtime</a:t>
+              <a:t>34.5 h of overtime</a:t>
             </a:r>
           </a:p>
         </p:txBody>
@@ -5730,7 +5730,7 @@
                 </a:solidFill>
                 <a:latin typeface="Roboto"/>
               </a:rPr>
-              <a:t>Technicians worked 69.5 h of overtime in July, 6.2% of ordinary hours (target under 5.0%), against 5.4% in June. Over the last year it has gone from 2.4% to 6.2%.</a:t>
+              <a:t>Technicians worked 57.5 h of overtime in July, 4.9% of ordinary hours (target under 5.0%), against 7.2% in June. Over the last year it has gone from 3.3% to 4.9%.</a:t>
             </a:r>
           </a:p>
         </p:txBody>
@@ -5857,7 +5857,7 @@
                 </a:solidFill>
                 <a:latin typeface="Roboto"/>
               </a:rPr>
-              <a:t>After-hours call-out is the main reason: 37.5 h, 54.0% of the overtime. Technician T5 carried the most (16.0 h). Above target by 13.3 h.</a:t>
+              <a:t>After-hours call-out is the main reason: 27.0 h, 47.0% of the overtime. Technician T1 carried the most (20.5 h).</a:t>
             </a:r>
           </a:p>
         </p:txBody>
@@ -5935,7 +5935,7 @@
                 </a:solidFill>
                 <a:latin typeface="Roboto"/>
               </a:rPr>
-              <a:t>Data retrieved 2pm, Tue 6 Oct 2026 · Generated 8 Oct 2026, 6:29pm · Sample data · Made with Python (python-pptx)</a:t>
+              <a:t>Data retrieved 2pm, Tue 6 Oct 2026 · Generated 8 Oct 2026, 11:41pm · Sample data · Made with Python (python-pptx)</a:t>
             </a:r>
           </a:p>
         </p:txBody>
@@ -6250,7 +6250,7 @@
                 </a:solidFill>
                 <a:latin typeface="Roboto"/>
               </a:rPr>
-              <a:t>Data retrieved 2pm, Tue 6 Oct 2026 · Generated 8 Oct 2026, 6:29pm · Sample data · Made with Python (python-pptx)</a:t>
+              <a:t>Data retrieved 2pm, Tue 6 Oct 2026 · Generated 8 Oct 2026, 11:41pm · Sample data · Made with Python (python-pptx)</a:t>
             </a:r>
           </a:p>
         </p:txBody>
@@ -6565,7 +6565,7 @@
                 </a:solidFill>
                 <a:latin typeface="Roboto"/>
               </a:rPr>
-              <a:t>Data retrieved 2pm, Tue 6 Oct 2026 · Generated 8 Oct 2026, 6:29pm · Sample data · Made with Python (python-pptx)</a:t>
+              <a:t>Data retrieved 2pm, Tue 6 Oct 2026 · Generated 8 Oct 2026, 11:41pm · Sample data · Made with Python (python-pptx)</a:t>
             </a:r>
           </a:p>
         </p:txBody>

--- a/media/exports/reports/2026-07/overtime.pptx
+++ b/media/exports/reports/2026-07/overtime.pptx
@@ -1243,7 +1243,7 @@
           <a:lstStyle/>
           <a:p>
             <a:r>
-              <a:t>Where is overtime creeping up, and why?. Sample Electrical &amp; Air Pty Ltd. Period: July 2026. Each technician's paid hours, day by day: ordinary hours and overtime, with the main reason for the overtime.</a:t>
+              <a:t>Where is overtime creeping up, and why?. Sample Electrical &amp; Air Pty Ltd. Period: July 2026. In short: Overtime was 4.9% of ordinary hours in July (target under 5.0%), up from 3.3% a year earlier. Each technician's paid hours, day by day: ordinary hours and overtime, with the main reason for the overtime.</a:t>
             </a:r>
           </a:p>
         </p:txBody>
@@ -4703,7 +4703,7 @@
                 </a:solidFill>
                 <a:latin typeface="Roboto"/>
               </a:rPr>
-              <a:t>Period: July 2026. Each technician's paid hours, day by day: ordinary hours and overtime, with the main reason for the overtime.</a:t>
+              <a:t>Period: July 2026. In short: Overtime was 4.9% of ordinary hours in July (target under 5.0%), up from 3.3% a year earlier. Each technician's paid hours, day by day: ordinary hours and overtime, with the main reason for the overtime.</a:t>
             </a:r>
           </a:p>
         </p:txBody>
@@ -4868,7 +4868,7 @@
                 </a:solidFill>
                 <a:latin typeface="Roboto"/>
               </a:rPr>
-              <a:t>Data retrieved 2pm, Tue 6 Oct 2026 · Generated 8 Oct 2026, 11:41pm · Sample data · Made with Python (python-pptx)</a:t>
+              <a:t>Data retrieved 2pm, Tue 6 Oct 2026 · Generated 10 Oct 2026, 9:55pm · Sample data · Made with Python (python-pptx)</a:t>
             </a:r>
           </a:p>
         </p:txBody>
@@ -5935,7 +5935,7 @@
                 </a:solidFill>
                 <a:latin typeface="Roboto"/>
               </a:rPr>
-              <a:t>Data retrieved 2pm, Tue 6 Oct 2026 · Generated 8 Oct 2026, 11:41pm · Sample data · Made with Python (python-pptx)</a:t>
+              <a:t>Data retrieved 2pm, Tue 6 Oct 2026 · Generated 10 Oct 2026, 9:55pm · Sample data · Made with Python (python-pptx)</a:t>
             </a:r>
           </a:p>
         </p:txBody>
@@ -6250,7 +6250,7 @@
                 </a:solidFill>
                 <a:latin typeface="Roboto"/>
               </a:rPr>
-              <a:t>Data retrieved 2pm, Tue 6 Oct 2026 · Generated 8 Oct 2026, 11:41pm · Sample data · Made with Python (python-pptx)</a:t>
+              <a:t>Data retrieved 2pm, Tue 6 Oct 2026 · Generated 10 Oct 2026, 9:55pm · Sample data · Made with Python (python-pptx)</a:t>
             </a:r>
           </a:p>
         </p:txBody>
@@ -6565,7 +6565,7 @@
                 </a:solidFill>
                 <a:latin typeface="Roboto"/>
               </a:rPr>
-              <a:t>Data retrieved 2pm, Tue 6 Oct 2026 · Generated 8 Oct 2026, 11:41pm · Sample data · Made with Python (python-pptx)</a:t>
+              <a:t>Data retrieved 2pm, Tue 6 Oct 2026 · Generated 10 Oct 2026, 9:55pm · Sample data · Made with Python (python-pptx)</a:t>
             </a:r>
           </a:p>
         </p:txBody>
